--- a/presentations/WorkingCollaborativelyIntro.pptx
+++ b/presentations/WorkingCollaborativelyIntro.pptx
@@ -5,7 +5,7 @@
     <p:sldMasterId id="2147483648" r:id="rId1"/>
   </p:sldMasterIdLst>
   <p:notesMasterIdLst>
-    <p:notesMasterId r:id="rId10"/>
+    <p:notesMasterId r:id="rId11"/>
   </p:notesMasterIdLst>
   <p:sldIdLst>
     <p:sldId id="256" r:id="rId2"/>
@@ -16,6 +16,7 @@
     <p:sldId id="427" r:id="rId7"/>
     <p:sldId id="430" r:id="rId8"/>
     <p:sldId id="431" r:id="rId9"/>
+    <p:sldId id="434" r:id="rId10"/>
   </p:sldIdLst>
   <p:sldSz cx="12192000" cy="6858000"/>
   <p:notesSz cx="6858000" cy="9144000"/>
@@ -204,7 +205,7 @@
           <a:p>
             <a:fld id="{BF9E9971-F775-4B4F-9523-C252FD816536}" type="datetimeFigureOut">
               <a:rPr lang="en-US" smtClean="0"/>
-              <a:t>7/14/25</a:t>
+              <a:t>7/12/26</a:t>
             </a:fld>
             <a:endParaRPr lang="en-US"/>
           </a:p>
@@ -1201,6 +1202,108 @@
 </p:notes>
 </file>
 
+<file path=ppt/notesSlides/notesSlide9.xml><?xml version="1.0" encoding="utf-8"?>
+<p:notes xmlns:a="http://schemas.openxmlformats.org/drawingml/2006/main" xmlns:r="http://schemas.openxmlformats.org/officeDocument/2006/relationships" xmlns:p="http://schemas.openxmlformats.org/presentationml/2006/main">
+  <p:cSld>
+    <p:spTree>
+      <p:nvGrpSpPr>
+        <p:cNvPr id="1" name=""/>
+        <p:cNvGrpSpPr/>
+        <p:nvPr/>
+      </p:nvGrpSpPr>
+      <p:grpSpPr>
+        <a:xfrm>
+          <a:off x="0" y="0"/>
+          <a:ext cx="0" cy="0"/>
+          <a:chOff x="0" y="0"/>
+          <a:chExt cx="0" cy="0"/>
+        </a:xfrm>
+      </p:grpSpPr>
+      <p:sp>
+        <p:nvSpPr>
+          <p:cNvPr id="2" name="Slide Image Placeholder 1"/>
+          <p:cNvSpPr>
+            <a:spLocks noGrp="1" noRot="1" noChangeAspect="1"/>
+          </p:cNvSpPr>
+          <p:nvPr>
+            <p:ph type="sldImg"/>
+          </p:nvPr>
+        </p:nvSpPr>
+        <p:spPr/>
+      </p:sp>
+      <p:sp>
+        <p:nvSpPr>
+          <p:cNvPr id="3" name="Notes Placeholder 2"/>
+          <p:cNvSpPr>
+            <a:spLocks noGrp="1"/>
+          </p:cNvSpPr>
+          <p:nvPr>
+            <p:ph type="body" idx="1"/>
+          </p:nvPr>
+        </p:nvSpPr>
+        <p:spPr/>
+        <p:txBody>
+          <a:bodyPr/>
+          <a:lstStyle/>
+          <a:p>
+            <a:r>
+              <a:rPr lang="en-US" dirty="0"/>
+              <a:t>Working with coding agents- you still have to be good at communicating so the agent can do what you want. Describe the problem, what you want it to do to fix it, and what your expectations are on how it should interact with your code.</a:t>
+            </a:r>
+          </a:p>
+          <a:p>
+            <a:r>
+              <a:rPr lang="en-US" dirty="0"/>
+              <a:t>Discuss in your group how you want to use coding agents and come to agreement on guidelines. </a:t>
+            </a:r>
+          </a:p>
+          <a:p>
+            <a:r>
+              <a:rPr lang="en-US" dirty="0"/>
+              <a:t>Maintain responsibility, it is still your group's code, and the changes that you introduce with your agent are your changes.</a:t>
+            </a:r>
+          </a:p>
+          <a:p>
+            <a:endParaRPr lang="en-US" dirty="0"/>
+          </a:p>
+        </p:txBody>
+      </p:sp>
+      <p:sp>
+        <p:nvSpPr>
+          <p:cNvPr id="4" name="Slide Number Placeholder 3"/>
+          <p:cNvSpPr>
+            <a:spLocks noGrp="1"/>
+          </p:cNvSpPr>
+          <p:nvPr>
+            <p:ph type="sldNum" sz="quarter" idx="5"/>
+          </p:nvPr>
+        </p:nvSpPr>
+        <p:spPr/>
+        <p:txBody>
+          <a:bodyPr/>
+          <a:lstStyle/>
+          <a:p>
+            <a:fld id="{1BE5D5F3-F0A8-9F42-BB89-247C7844DEC9}" type="slidenum">
+              <a:rPr lang="en-US" smtClean="0"/>
+              <a:t>9</a:t>
+            </a:fld>
+            <a:endParaRPr lang="en-US"/>
+          </a:p>
+        </p:txBody>
+      </p:sp>
+    </p:spTree>
+    <p:extLst>
+      <p:ext uri="{BB962C8B-B14F-4D97-AF65-F5344CB8AC3E}">
+        <p14:creationId xmlns:p14="http://schemas.microsoft.com/office/powerpoint/2010/main" val="317337132"/>
+      </p:ext>
+    </p:extLst>
+  </p:cSld>
+  <p:clrMapOvr>
+    <a:masterClrMapping/>
+  </p:clrMapOvr>
+</p:notes>
+</file>
+
 <file path=ppt/slideLayouts/slideLayout1.xml><?xml version="1.0" encoding="utf-8"?>
 <p:sldLayout xmlns:a="http://schemas.openxmlformats.org/drawingml/2006/main" xmlns:r="http://schemas.openxmlformats.org/officeDocument/2006/relationships" xmlns:p="http://schemas.openxmlformats.org/presentationml/2006/main" type="title" preserve="1">
   <p:cSld name="Title Slide">
@@ -1348,7 +1451,7 @@
           <a:p>
             <a:fld id="{86253E89-F168-3842-8374-F70D79A089A6}" type="datetimeFigureOut">
               <a:rPr lang="en-US" smtClean="0"/>
-              <a:t>7/14/25</a:t>
+              <a:t>7/12/26</a:t>
             </a:fld>
             <a:endParaRPr lang="en-US"/>
           </a:p>
@@ -1576,7 +1679,7 @@
           <a:p>
             <a:fld id="{86253E89-F168-3842-8374-F70D79A089A6}" type="datetimeFigureOut">
               <a:rPr lang="en-US" smtClean="0"/>
-              <a:t>7/14/25</a:t>
+              <a:t>7/12/26</a:t>
             </a:fld>
             <a:endParaRPr lang="en-US"/>
           </a:p>
@@ -1784,7 +1887,7 @@
           <a:p>
             <a:fld id="{86253E89-F168-3842-8374-F70D79A089A6}" type="datetimeFigureOut">
               <a:rPr lang="en-US" smtClean="0"/>
-              <a:t>7/14/25</a:t>
+              <a:t>7/12/26</a:t>
             </a:fld>
             <a:endParaRPr lang="en-US"/>
           </a:p>
@@ -1982,7 +2085,7 @@
           <a:p>
             <a:fld id="{86253E89-F168-3842-8374-F70D79A089A6}" type="datetimeFigureOut">
               <a:rPr lang="en-US" smtClean="0"/>
-              <a:t>7/14/25</a:t>
+              <a:t>7/12/26</a:t>
             </a:fld>
             <a:endParaRPr lang="en-US"/>
           </a:p>
@@ -2287,7 +2390,7 @@
           <a:p>
             <a:fld id="{86253E89-F168-3842-8374-F70D79A089A6}" type="datetimeFigureOut">
               <a:rPr lang="en-US" smtClean="0"/>
-              <a:t>7/14/25</a:t>
+              <a:t>7/12/26</a:t>
             </a:fld>
             <a:endParaRPr lang="en-US"/>
           </a:p>
@@ -2552,7 +2655,7 @@
           <a:p>
             <a:fld id="{86253E89-F168-3842-8374-F70D79A089A6}" type="datetimeFigureOut">
               <a:rPr lang="en-US" smtClean="0"/>
-              <a:t>7/14/25</a:t>
+              <a:t>7/12/26</a:t>
             </a:fld>
             <a:endParaRPr lang="en-US"/>
           </a:p>
@@ -2964,7 +3067,7 @@
           <a:p>
             <a:fld id="{86253E89-F168-3842-8374-F70D79A089A6}" type="datetimeFigureOut">
               <a:rPr lang="en-US" smtClean="0"/>
-              <a:t>7/14/25</a:t>
+              <a:t>7/12/26</a:t>
             </a:fld>
             <a:endParaRPr lang="en-US"/>
           </a:p>
@@ -3105,7 +3208,7 @@
           <a:p>
             <a:fld id="{86253E89-F168-3842-8374-F70D79A089A6}" type="datetimeFigureOut">
               <a:rPr lang="en-US" smtClean="0"/>
-              <a:t>7/14/25</a:t>
+              <a:t>7/12/26</a:t>
             </a:fld>
             <a:endParaRPr lang="en-US"/>
           </a:p>
@@ -3218,7 +3321,7 @@
           <a:p>
             <a:fld id="{86253E89-F168-3842-8374-F70D79A089A6}" type="datetimeFigureOut">
               <a:rPr lang="en-US" smtClean="0"/>
-              <a:t>7/14/25</a:t>
+              <a:t>7/12/26</a:t>
             </a:fld>
             <a:endParaRPr lang="en-US"/>
           </a:p>
@@ -3529,7 +3632,7 @@
           <a:p>
             <a:fld id="{86253E89-F168-3842-8374-F70D79A089A6}" type="datetimeFigureOut">
               <a:rPr lang="en-US" smtClean="0"/>
-              <a:t>7/14/25</a:t>
+              <a:t>7/12/26</a:t>
             </a:fld>
             <a:endParaRPr lang="en-US"/>
           </a:p>
@@ -3817,7 +3920,7 @@
           <a:p>
             <a:fld id="{86253E89-F168-3842-8374-F70D79A089A6}" type="datetimeFigureOut">
               <a:rPr lang="en-US" smtClean="0"/>
-              <a:t>7/14/25</a:t>
+              <a:t>7/12/26</a:t>
             </a:fld>
             <a:endParaRPr lang="en-US"/>
           </a:p>
@@ -4058,7 +4161,7 @@
           <a:p>
             <a:fld id="{86253E89-F168-3842-8374-F70D79A089A6}" type="datetimeFigureOut">
               <a:rPr lang="en-US" smtClean="0"/>
-              <a:t>7/14/25</a:t>
+              <a:t>7/12/26</a:t>
             </a:fld>
             <a:endParaRPr lang="en-US"/>
           </a:p>
@@ -5513,7 +5616,7 @@
             <a:pPr lvl="2"/>
             <a:r>
               <a:rPr lang="en-US" dirty="0"/>
-              <a:t>Egalitarian vs. acknowledged leader</a:t>
+              <a:t>Consensus vs majority vs acknowledged leader</a:t>
             </a:r>
           </a:p>
           <a:p>
@@ -5724,6 +5827,164 @@
     <p:extLst>
       <p:ext uri="{BB962C8B-B14F-4D97-AF65-F5344CB8AC3E}">
         <p14:creationId xmlns:p14="http://schemas.microsoft.com/office/powerpoint/2010/main" val="1870991877"/>
+      </p:ext>
+    </p:extLst>
+  </p:cSld>
+  <p:clrMapOvr>
+    <a:masterClrMapping/>
+  </p:clrMapOvr>
+</p:sld>
+</file>
+
+<file path=ppt/slides/slide9.xml><?xml version="1.0" encoding="utf-8"?>
+<p:sld xmlns:a="http://schemas.openxmlformats.org/drawingml/2006/main" xmlns:r="http://schemas.openxmlformats.org/officeDocument/2006/relationships" xmlns:p="http://schemas.openxmlformats.org/presentationml/2006/main">
+  <p:cSld>
+    <p:spTree>
+      <p:nvGrpSpPr>
+        <p:cNvPr id="1" name=""/>
+        <p:cNvGrpSpPr/>
+        <p:nvPr/>
+      </p:nvGrpSpPr>
+      <p:grpSpPr>
+        <a:xfrm>
+          <a:off x="0" y="0"/>
+          <a:ext cx="0" cy="0"/>
+          <a:chOff x="0" y="0"/>
+          <a:chExt cx="0" cy="0"/>
+        </a:xfrm>
+      </p:grpSpPr>
+      <p:sp>
+        <p:nvSpPr>
+          <p:cNvPr id="2" name="Title 1">
+            <a:extLst>
+              <a:ext uri="{FF2B5EF4-FFF2-40B4-BE49-F238E27FC236}">
+                <a16:creationId xmlns:a16="http://schemas.microsoft.com/office/drawing/2014/main" id="{18C9CC8D-3EA3-EBA9-6EAA-CBC6EDEAFBE1}"/>
+              </a:ext>
+            </a:extLst>
+          </p:cNvPr>
+          <p:cNvSpPr>
+            <a:spLocks noGrp="1"/>
+          </p:cNvSpPr>
+          <p:nvPr>
+            <p:ph type="title"/>
+          </p:nvPr>
+        </p:nvSpPr>
+        <p:spPr/>
+        <p:txBody>
+          <a:bodyPr/>
+          <a:lstStyle/>
+          <a:p>
+            <a:r>
+              <a:rPr lang="en-US" dirty="0"/>
+              <a:t>Use of AI Coding Agents</a:t>
+            </a:r>
+          </a:p>
+        </p:txBody>
+      </p:sp>
+      <p:sp>
+        <p:nvSpPr>
+          <p:cNvPr id="3" name="Content Placeholder 2">
+            <a:extLst>
+              <a:ext uri="{FF2B5EF4-FFF2-40B4-BE49-F238E27FC236}">
+                <a16:creationId xmlns:a16="http://schemas.microsoft.com/office/drawing/2014/main" id="{476D18C0-F4E4-E5A6-0B3D-12A544B2BB03}"/>
+              </a:ext>
+            </a:extLst>
+          </p:cNvPr>
+          <p:cNvSpPr>
+            <a:spLocks noGrp="1"/>
+          </p:cNvSpPr>
+          <p:nvPr>
+            <p:ph idx="1"/>
+          </p:nvPr>
+        </p:nvSpPr>
+        <p:spPr>
+          <a:xfrm>
+            <a:off x="838200" y="1825625"/>
+            <a:ext cx="10515600" cy="4667250"/>
+          </a:xfrm>
+        </p:spPr>
+        <p:txBody>
+          <a:bodyPr>
+            <a:normAutofit fontScale="92500"/>
+          </a:bodyPr>
+          <a:lstStyle/>
+          <a:p>
+            <a:r>
+              <a:rPr lang="en-US" dirty="0"/>
+              <a:t>Communication still important</a:t>
+            </a:r>
+          </a:p>
+          <a:p>
+            <a:pPr lvl="1"/>
+            <a:r>
+              <a:rPr lang="en-US" dirty="0"/>
+              <a:t>Agents will perform better when the problem and instructions are clearly stated</a:t>
+            </a:r>
+          </a:p>
+          <a:p>
+            <a:pPr lvl="1"/>
+            <a:r>
+              <a:rPr lang="en-US" dirty="0"/>
+              <a:t>Tell the agent how it should interact with the code</a:t>
+            </a:r>
+          </a:p>
+          <a:p>
+            <a:endParaRPr lang="en-US" dirty="0"/>
+          </a:p>
+          <a:p>
+            <a:r>
+              <a:rPr lang="en-US" dirty="0"/>
+              <a:t>Discuss in your group</a:t>
+            </a:r>
+          </a:p>
+          <a:p>
+            <a:pPr lvl="1"/>
+            <a:r>
+              <a:rPr lang="en-US" dirty="0"/>
+              <a:t>How you would or would not like to use AI for </a:t>
+            </a:r>
+            <a:r>
+              <a:rPr lang="en-US"/>
+              <a:t>your software</a:t>
+            </a:r>
+            <a:endParaRPr lang="en-US" dirty="0"/>
+          </a:p>
+          <a:p>
+            <a:pPr lvl="1"/>
+            <a:r>
+              <a:rPr lang="en-US" dirty="0"/>
+              <a:t>Guidelines for using AI coding agents</a:t>
+            </a:r>
+          </a:p>
+          <a:p>
+            <a:endParaRPr lang="en-US" dirty="0"/>
+          </a:p>
+          <a:p>
+            <a:r>
+              <a:rPr lang="en-US" dirty="0"/>
+              <a:t>Maintain responsibility</a:t>
+            </a:r>
+          </a:p>
+          <a:p>
+            <a:pPr lvl="1"/>
+            <a:r>
+              <a:rPr lang="en-US" dirty="0"/>
+              <a:t>You are allowing agents to work on your group’s code</a:t>
+            </a:r>
+          </a:p>
+          <a:p>
+            <a:pPr lvl="1"/>
+            <a:r>
+              <a:rPr lang="en-US" dirty="0"/>
+              <a:t>Changes that are introduced by your agent are your changes</a:t>
+            </a:r>
+          </a:p>
+        </p:txBody>
+      </p:sp>
+    </p:spTree>
+    <p:extLst>
+      <p:ext uri="{BB962C8B-B14F-4D97-AF65-F5344CB8AC3E}">
+        <p14:creationId xmlns:p14="http://schemas.microsoft.com/office/powerpoint/2010/main" val="617085354"/>
       </p:ext>
     </p:extLst>
   </p:cSld>
